--- a/KnowedgeEngine-presentation.pptx
+++ b/KnowedgeEngine-presentation.pptx
@@ -6,8 +6,8 @@
   </p:sldMasterIdLst>
   <p:sldIdLst>
     <p:sldId id="257" r:id="rId2"/>
-    <p:sldId id="258" r:id="rId3"/>
-    <p:sldId id="263" r:id="rId4"/>
+    <p:sldId id="263" r:id="rId3"/>
+    <p:sldId id="267" r:id="rId4"/>
     <p:sldId id="264" r:id="rId5"/>
     <p:sldId id="265" r:id="rId6"/>
     <p:sldId id="266" r:id="rId7"/>
@@ -16,27 +16,20 @@
   <p:notesSz cx="6858000" cy="9144000"/>
   <p:embeddedFontLst>
     <p:embeddedFont>
-      <p:font typeface="Calibri" panose="020F0502020204030204" pitchFamily="34" charset="0"/>
-      <p:regular r:id="rId8"/>
-      <p:bold r:id="rId9"/>
-      <p:italic r:id="rId10"/>
-      <p:boldItalic r:id="rId11"/>
+      <p:font typeface="Arial Black" panose="020B0A04020102020204" pitchFamily="34" charset="0"/>
+      <p:bold r:id="rId8"/>
     </p:embeddedFont>
     <p:embeddedFont>
       <p:font typeface="Cy Grotesk Wide" panose="020B0604020202020204" charset="-52"/>
-      <p:regular r:id="rId12"/>
+      <p:regular r:id="rId9"/>
     </p:embeddedFont>
     <p:embeddedFont>
       <p:font typeface="Cy Grotesk Wide Bold" panose="020B0604020202020204" charset="-52"/>
-      <p:regular r:id="rId13"/>
-    </p:embeddedFont>
-    <p:embeddedFont>
-      <p:font typeface="Arial Black" panose="020B0A04020102020204" pitchFamily="34" charset="0"/>
-      <p:bold r:id="rId14"/>
+      <p:regular r:id="rId10"/>
     </p:embeddedFont>
     <p:embeddedFont>
       <p:font typeface="Lastica Bold" panose="020B0604020202020204" charset="0"/>
-      <p:regular r:id="rId15"/>
+      <p:regular r:id="rId11"/>
     </p:embeddedFont>
   </p:embeddedFontLst>
   <p:defaultTextStyle>
@@ -333,7 +326,7 @@
             <a:fld id="{1D8BD707-D9CF-40AE-B4C6-C98DA3205C09}" type="datetimeFigureOut">
               <a:rPr lang="en-US" smtClean="0"/>
               <a:pPr/>
-              <a:t>3/20/2026</a:t>
+              <a:t>3/23/2026</a:t>
             </a:fld>
             <a:endParaRPr lang="en-US"/>
           </a:p>
@@ -510,7 +503,7 @@
             <a:fld id="{1D8BD707-D9CF-40AE-B4C6-C98DA3205C09}" type="datetimeFigureOut">
               <a:rPr lang="en-US" smtClean="0"/>
               <a:pPr/>
-              <a:t>3/20/2026</a:t>
+              <a:t>3/23/2026</a:t>
             </a:fld>
             <a:endParaRPr lang="en-US"/>
           </a:p>
@@ -697,7 +690,7 @@
             <a:fld id="{1D8BD707-D9CF-40AE-B4C6-C98DA3205C09}" type="datetimeFigureOut">
               <a:rPr lang="en-US" smtClean="0"/>
               <a:pPr/>
-              <a:t>3/20/2026</a:t>
+              <a:t>3/23/2026</a:t>
             </a:fld>
             <a:endParaRPr lang="en-US"/>
           </a:p>
@@ -874,7 +867,7 @@
             <a:fld id="{1D8BD707-D9CF-40AE-B4C6-C98DA3205C09}" type="datetimeFigureOut">
               <a:rPr lang="en-US" smtClean="0"/>
               <a:pPr/>
-              <a:t>3/20/2026</a:t>
+              <a:t>3/23/2026</a:t>
             </a:fld>
             <a:endParaRPr lang="en-US"/>
           </a:p>
@@ -1128,7 +1121,7 @@
             <a:fld id="{1D8BD707-D9CF-40AE-B4C6-C98DA3205C09}" type="datetimeFigureOut">
               <a:rPr lang="en-US" smtClean="0"/>
               <a:pPr/>
-              <a:t>3/20/2026</a:t>
+              <a:t>3/23/2026</a:t>
             </a:fld>
             <a:endParaRPr lang="en-US"/>
           </a:p>
@@ -1422,7 +1415,7 @@
             <a:fld id="{1D8BD707-D9CF-40AE-B4C6-C98DA3205C09}" type="datetimeFigureOut">
               <a:rPr lang="en-US" smtClean="0"/>
               <a:pPr/>
-              <a:t>3/20/2026</a:t>
+              <a:t>3/23/2026</a:t>
             </a:fld>
             <a:endParaRPr lang="en-US"/>
           </a:p>
@@ -1850,7 +1843,7 @@
             <a:fld id="{1D8BD707-D9CF-40AE-B4C6-C98DA3205C09}" type="datetimeFigureOut">
               <a:rPr lang="en-US" smtClean="0"/>
               <a:pPr/>
-              <a:t>3/20/2026</a:t>
+              <a:t>3/23/2026</a:t>
             </a:fld>
             <a:endParaRPr lang="en-US"/>
           </a:p>
@@ -1976,7 +1969,7 @@
             <a:fld id="{1D8BD707-D9CF-40AE-B4C6-C98DA3205C09}" type="datetimeFigureOut">
               <a:rPr lang="en-US" smtClean="0"/>
               <a:pPr/>
-              <a:t>3/20/2026</a:t>
+              <a:t>3/23/2026</a:t>
             </a:fld>
             <a:endParaRPr lang="en-US"/>
           </a:p>
@@ -2080,7 +2073,7 @@
             <a:fld id="{1D8BD707-D9CF-40AE-B4C6-C98DA3205C09}" type="datetimeFigureOut">
               <a:rPr lang="en-US" smtClean="0"/>
               <a:pPr/>
-              <a:t>3/20/2026</a:t>
+              <a:t>3/23/2026</a:t>
             </a:fld>
             <a:endParaRPr lang="en-US"/>
           </a:p>
@@ -2364,7 +2357,7 @@
             <a:fld id="{1D8BD707-D9CF-40AE-B4C6-C98DA3205C09}" type="datetimeFigureOut">
               <a:rPr lang="en-US" smtClean="0"/>
               <a:pPr/>
-              <a:t>3/20/2026</a:t>
+              <a:t>3/23/2026</a:t>
             </a:fld>
             <a:endParaRPr lang="en-US"/>
           </a:p>
@@ -2625,7 +2618,7 @@
             <a:fld id="{1D8BD707-D9CF-40AE-B4C6-C98DA3205C09}" type="datetimeFigureOut">
               <a:rPr lang="en-US" smtClean="0"/>
               <a:pPr/>
-              <a:t>3/20/2026</a:t>
+              <a:t>3/23/2026</a:t>
             </a:fld>
             <a:endParaRPr lang="en-US"/>
           </a:p>
@@ -2845,7 +2838,7 @@
             <a:fld id="{1D8BD707-D9CF-40AE-B4C6-C98DA3205C09}" type="datetimeFigureOut">
               <a:rPr lang="en-US" smtClean="0"/>
               <a:pPr/>
-              <a:t>3/20/2026</a:t>
+              <a:t>3/23/2026</a:t>
             </a:fld>
             <a:endParaRPr lang="en-US"/>
           </a:p>
@@ -3278,7 +3271,7 @@
             <a:blip r:embed="rId2">
               <a:extLst>
                 <a:ext uri="{96DAC541-7B7A-43D3-8B79-37D633B846F1}">
-                  <asvg:svgBlip xmlns:asvg="http://schemas.microsoft.com/office/drawing/2016/SVG/main" xmlns="" r:embed="rId3"/>
+                  <asvg:svgBlip xmlns:asvg="http://schemas.microsoft.com/office/drawing/2016/SVG/main" r:embed="rId3"/>
                 </a:ext>
               </a:extLst>
             </a:blip>
@@ -3337,7 +3330,7 @@
             <a:blip r:embed="rId4">
               <a:extLst>
                 <a:ext uri="{96DAC541-7B7A-43D3-8B79-37D633B846F1}">
-                  <asvg:svgBlip xmlns:asvg="http://schemas.microsoft.com/office/drawing/2016/SVG/main" xmlns="" r:embed="rId5"/>
+                  <asvg:svgBlip xmlns:asvg="http://schemas.microsoft.com/office/drawing/2016/SVG/main" r:embed="rId5"/>
                 </a:ext>
               </a:extLst>
             </a:blip>
@@ -3381,7 +3374,7 @@
               </a:lnSpc>
             </a:pPr>
             <a:r>
-              <a:rPr lang="en-US" sz="9440" b="1" spc="1123" dirty="0" smtClean="0">
+              <a:rPr lang="en-US" sz="9440" b="1" spc="1123" dirty="0">
                 <a:solidFill>
                   <a:srgbClr val="3C6CA8"/>
                 </a:solidFill>
@@ -3392,15 +3385,6 @@
               </a:rPr>
               <a:t>Knowledge Engine</a:t>
             </a:r>
-            <a:endParaRPr lang="en-US" sz="9440" b="1" spc="1123" dirty="0">
-              <a:solidFill>
-                <a:srgbClr val="3C6CA8"/>
-              </a:solidFill>
-              <a:latin typeface="Lastica Bold"/>
-              <a:ea typeface="Lastica Bold"/>
-              <a:cs typeface="Lastica Bold"/>
-              <a:sym typeface="Lastica Bold"/>
-            </a:endParaRPr>
           </a:p>
         </p:txBody>
       </p:sp>
@@ -3421,13 +3405,6 @@
       </p:transition>
     </mc:Fallback>
   </mc:AlternateContent>
-  <p:timing>
-    <p:tnLst>
-      <p:par>
-        <p:cTn id="1" dur="indefinite" restart="never" nodeType="tmRoot"/>
-      </p:par>
-    </p:tnLst>
-  </p:timing>
 </p:sld>
 </file>
 
@@ -3498,7 +3475,7 @@
             <a:blip r:embed="rId2">
               <a:extLst>
                 <a:ext uri="{96DAC541-7B7A-43D3-8B79-37D633B846F1}">
-                  <asvg:svgBlip xmlns:asvg="http://schemas.microsoft.com/office/drawing/2016/SVG/main" xmlns="" r:embed="rId3"/>
+                  <asvg:svgBlip xmlns:asvg="http://schemas.microsoft.com/office/drawing/2016/SVG/main" r:embed="rId3"/>
                 </a:ext>
               </a:extLst>
             </a:blip>
@@ -3557,7 +3534,7 @@
             <a:blip r:embed="rId4">
               <a:extLst>
                 <a:ext uri="{96DAC541-7B7A-43D3-8B79-37D633B846F1}">
-                  <asvg:svgBlip xmlns:asvg="http://schemas.microsoft.com/office/drawing/2016/SVG/main" xmlns="" r:embed="rId5"/>
+                  <asvg:svgBlip xmlns:asvg="http://schemas.microsoft.com/office/drawing/2016/SVG/main" r:embed="rId5"/>
                 </a:ext>
               </a:extLst>
             </a:blip>
@@ -3570,7 +3547,158 @@
           <a:bodyPr/>
           <a:lstStyle/>
           <a:p>
-            <a:endParaRPr lang="bg-BG" dirty="0"/>
+            <a:endParaRPr lang="bg-BG"/>
+          </a:p>
+        </p:txBody>
+      </p:sp>
+      <p:sp>
+        <p:nvSpPr>
+          <p:cNvPr id="5" name="TextBox 5"/>
+          <p:cNvSpPr txBox="1"/>
+          <p:nvPr/>
+        </p:nvSpPr>
+        <p:spPr>
+          <a:xfrm>
+            <a:off x="685800" y="5957623"/>
+            <a:ext cx="9902028" cy="2077492"/>
+          </a:xfrm>
+          <a:prstGeom prst="rect">
+            <a:avLst/>
+          </a:prstGeom>
+        </p:spPr>
+        <p:txBody>
+          <a:bodyPr lIns="0" tIns="0" rIns="0" bIns="0" rtlCol="0" anchor="t">
+            <a:spAutoFit/>
+          </a:bodyPr>
+          <a:lstStyle/>
+          <a:p>
+            <a:pPr marL="589890" lvl="1" indent="-294945" algn="just">
+              <a:lnSpc>
+                <a:spcPts val="2732"/>
+              </a:lnSpc>
+              <a:buFont typeface="Arial"/>
+              <a:buChar char="•"/>
+            </a:pPr>
+            <a:r>
+              <a:rPr lang="en-US" sz="2732" dirty="0">
+                <a:solidFill>
+                  <a:schemeClr val="accent1">
+                    <a:lumMod val="75000"/>
+                  </a:schemeClr>
+                </a:solidFill>
+                <a:latin typeface="Cy Grotesk Wide"/>
+                <a:ea typeface="Cy Grotesk Wide"/>
+                <a:cs typeface="Cy Grotesk Wide"/>
+                <a:sym typeface="Cy Grotesk Wide"/>
+              </a:rPr>
+              <a:t>Randomly generated math questions</a:t>
+            </a:r>
+          </a:p>
+          <a:p>
+            <a:pPr marL="589890" lvl="1" indent="-294945" algn="just">
+              <a:lnSpc>
+                <a:spcPts val="2732"/>
+              </a:lnSpc>
+              <a:buFont typeface="Arial"/>
+              <a:buChar char="•"/>
+            </a:pPr>
+            <a:endParaRPr lang="en-US" sz="2732" dirty="0">
+              <a:solidFill>
+                <a:schemeClr val="accent1">
+                  <a:lumMod val="75000"/>
+                </a:schemeClr>
+              </a:solidFill>
+              <a:latin typeface="Cy Grotesk Wide"/>
+              <a:ea typeface="Cy Grotesk Wide"/>
+              <a:cs typeface="Cy Grotesk Wide"/>
+              <a:sym typeface="Cy Grotesk Wide"/>
+            </a:endParaRPr>
+          </a:p>
+          <a:p>
+            <a:pPr marL="589890" lvl="1" indent="-294945" algn="just">
+              <a:lnSpc>
+                <a:spcPts val="2732"/>
+              </a:lnSpc>
+              <a:buFont typeface="Arial"/>
+              <a:buChar char="•"/>
+            </a:pPr>
+            <a:r>
+              <a:rPr lang="en-US" sz="2732" dirty="0">
+                <a:solidFill>
+                  <a:schemeClr val="accent1">
+                    <a:lumMod val="75000"/>
+                  </a:schemeClr>
+                </a:solidFill>
+                <a:latin typeface="Cy Grotesk Wide"/>
+                <a:ea typeface="Cy Grotesk Wide"/>
+                <a:cs typeface="Cy Grotesk Wide"/>
+                <a:sym typeface="Cy Grotesk Wide"/>
+              </a:rPr>
+              <a:t>Makes learning math easier</a:t>
+            </a:r>
+          </a:p>
+          <a:p>
+            <a:pPr marL="589890" lvl="1" indent="-294945" algn="just">
+              <a:lnSpc>
+                <a:spcPts val="2732"/>
+              </a:lnSpc>
+              <a:buFont typeface="Arial"/>
+              <a:buChar char="•"/>
+            </a:pPr>
+            <a:endParaRPr lang="en-US" sz="2732" dirty="0">
+              <a:solidFill>
+                <a:schemeClr val="accent1">
+                  <a:lumMod val="75000"/>
+                </a:schemeClr>
+              </a:solidFill>
+              <a:latin typeface="Cy Grotesk Wide"/>
+              <a:ea typeface="Cy Grotesk Wide"/>
+              <a:cs typeface="Cy Grotesk Wide"/>
+              <a:sym typeface="Cy Grotesk Wide"/>
+            </a:endParaRPr>
+          </a:p>
+          <a:p>
+            <a:pPr marL="589890" lvl="1" indent="-294945" algn="just">
+              <a:lnSpc>
+                <a:spcPts val="2732"/>
+              </a:lnSpc>
+              <a:buFont typeface="Arial"/>
+              <a:buChar char="•"/>
+            </a:pPr>
+            <a:r>
+              <a:rPr lang="en-US" sz="2732" dirty="0">
+                <a:solidFill>
+                  <a:schemeClr val="accent1">
+                    <a:lumMod val="75000"/>
+                  </a:schemeClr>
+                </a:solidFill>
+                <a:latin typeface="Cy Grotesk Wide"/>
+                <a:ea typeface="Cy Grotesk Wide"/>
+                <a:cs typeface="Cy Grotesk Wide"/>
+                <a:sym typeface="Cy Grotesk Wide"/>
+              </a:rPr>
+              <a:t>Compares your test scores against others</a:t>
+            </a:r>
+          </a:p>
+          <a:p>
+            <a:pPr marL="589890" lvl="1" indent="-294945" algn="just">
+              <a:lnSpc>
+                <a:spcPts val="2732"/>
+              </a:lnSpc>
+              <a:buFont typeface="Arial"/>
+              <a:buChar char="•"/>
+            </a:pPr>
+            <a:endParaRPr lang="en-US" sz="2732" dirty="0">
+              <a:solidFill>
+                <a:schemeClr val="accent1">
+                  <a:lumMod val="75000"/>
+                </a:schemeClr>
+              </a:solidFill>
+              <a:latin typeface="Cy Grotesk Wide"/>
+              <a:ea typeface="Cy Grotesk Wide"/>
+              <a:cs typeface="Cy Grotesk Wide"/>
+              <a:sym typeface="Cy Grotesk Wide"/>
+            </a:endParaRPr>
           </a:p>
         </p:txBody>
       </p:sp>
@@ -3582,26 +3710,26 @@
         </p:nvSpPr>
         <p:spPr>
           <a:xfrm>
-            <a:off x="141194" y="952500"/>
-            <a:ext cx="17384806" cy="2154436"/>
+            <a:off x="1494431" y="2771259"/>
+            <a:ext cx="15515310" cy="1038746"/>
           </a:xfrm>
           <a:prstGeom prst="rect">
             <a:avLst/>
           </a:prstGeom>
         </p:spPr>
         <p:txBody>
-          <a:bodyPr wrap="square" lIns="0" tIns="0" rIns="0" bIns="0" rtlCol="0" anchor="t">
+          <a:bodyPr lIns="0" tIns="0" rIns="0" bIns="0" rtlCol="0" anchor="t">
             <a:spAutoFit/>
           </a:bodyPr>
           <a:lstStyle/>
           <a:p>
-            <a:pPr algn="l">
+            <a:pPr algn="ctr">
               <a:lnSpc>
                 <a:spcPts val="8400"/>
               </a:lnSpc>
             </a:pPr>
             <a:r>
-              <a:rPr lang="en-US" sz="6000" b="1" spc="714" dirty="0" smtClean="0">
+              <a:rPr lang="en-US" sz="6000" b="1" spc="714" dirty="0">
                 <a:solidFill>
                   <a:srgbClr val="3C6CA8"/>
                 </a:solidFill>
@@ -3610,23 +3738,14 @@
                 <a:cs typeface="Lastica Bold"/>
                 <a:sym typeface="Lastica Bold"/>
               </a:rPr>
-              <a:t>By THE KNOWLEDGE ENGINE team </a:t>
-            </a:r>
-            <a:endParaRPr lang="en-US" sz="6000" b="1" spc="714" dirty="0">
-              <a:solidFill>
-                <a:srgbClr val="3C6CA8"/>
-              </a:solidFill>
-              <a:latin typeface="Lastica Bold"/>
-              <a:ea typeface="Lastica Bold"/>
-              <a:cs typeface="Lastica Bold"/>
-              <a:sym typeface="Lastica Bold"/>
-            </a:endParaRPr>
-          </a:p>
-        </p:txBody>
-      </p:sp>
-      <p:sp>
-        <p:nvSpPr>
-          <p:cNvPr id="7" name="AutoShape 2" descr="Gemini_Generated_Image_978zyp978zyp978z"/>
+              <a:t>Features</a:t>
+            </a:r>
+          </a:p>
+        </p:txBody>
+      </p:sp>
+      <p:sp>
+        <p:nvSpPr>
+          <p:cNvPr id="7" name="AutoShape 2" descr="Александра Якимчук"/>
           <p:cNvSpPr>
             <a:spLocks noChangeAspect="1" noChangeArrowheads="1"/>
           </p:cNvSpPr>
@@ -3634,8 +3753,8 @@
         </p:nvSpPr>
         <p:spPr bwMode="auto">
           <a:xfrm>
-            <a:off x="-1752600" y="-2171700"/>
-            <a:ext cx="4991100" cy="4991101"/>
+            <a:off x="155575" y="-144463"/>
+            <a:ext cx="304800" cy="304801"/>
           </a:xfrm>
           <a:prstGeom prst="rect">
             <a:avLst/>
@@ -3660,354 +3779,6 @@
           <a:lstStyle/>
           <a:p>
             <a:endParaRPr lang="bg-BG"/>
-          </a:p>
-        </p:txBody>
-      </p:sp>
-      <p:sp>
-        <p:nvSpPr>
-          <p:cNvPr id="10" name="AutoShape 4" descr="Вълкан Павлов"/>
-          <p:cNvSpPr>
-            <a:spLocks noChangeAspect="1" noChangeArrowheads="1"/>
-          </p:cNvSpPr>
-          <p:nvPr/>
-        </p:nvSpPr>
-        <p:spPr bwMode="auto">
-          <a:xfrm>
-            <a:off x="155575" y="-144463"/>
-            <a:ext cx="304800" cy="304801"/>
-          </a:xfrm>
-          <a:prstGeom prst="rect">
-            <a:avLst/>
-          </a:prstGeom>
-          <a:noFill/>
-          <a:extLst>
-            <a:ext uri="{909E8E84-426E-40DD-AFC4-6F175D3DCCD1}">
-              <a14:hiddenFill xmlns:a14="http://schemas.microsoft.com/office/drawing/2010/main">
-                <a:solidFill>
-                  <a:srgbClr val="FFFFFF"/>
-                </a:solidFill>
-              </a14:hiddenFill>
-            </a:ext>
-          </a:extLst>
-        </p:spPr>
-        <p:txBody>
-          <a:bodyPr vert="horz" wrap="square" lIns="91440" tIns="45720" rIns="91440" bIns="45720" numCol="1" anchor="t" anchorCtr="0" compatLnSpc="1">
-            <a:prstTxWarp prst="textNoShape">
-              <a:avLst/>
-            </a:prstTxWarp>
-          </a:bodyPr>
-          <a:lstStyle/>
-          <a:p>
-            <a:endParaRPr lang="bg-BG"/>
-          </a:p>
-        </p:txBody>
-      </p:sp>
-      <p:sp>
-        <p:nvSpPr>
-          <p:cNvPr id="31" name="Правоъгълник 30"/>
-          <p:cNvSpPr/>
-          <p:nvPr/>
-        </p:nvSpPr>
-        <p:spPr>
-          <a:xfrm>
-            <a:off x="8534400" y="3295724"/>
-            <a:ext cx="9144000" cy="6555641"/>
-          </a:xfrm>
-          <a:prstGeom prst="rect">
-            <a:avLst/>
-          </a:prstGeom>
-        </p:spPr>
-        <p:txBody>
-          <a:bodyPr anchor="ctr">
-            <a:spAutoFit/>
-          </a:bodyPr>
-          <a:lstStyle/>
-          <a:p>
-            <a:pPr marL="342900" indent="-342900">
-              <a:buFont typeface="Arial" panose="020B0604020202020204" pitchFamily="34" charset="0"/>
-              <a:buChar char="•"/>
-            </a:pPr>
-            <a:r>
-              <a:rPr lang="en-US" sz="2800" b="1" dirty="0" smtClean="0">
-                <a:solidFill>
-                  <a:schemeClr val="accent1">
-                    <a:lumMod val="75000"/>
-                  </a:schemeClr>
-                </a:solidFill>
-              </a:rPr>
-              <a:t>General </a:t>
-            </a:r>
-            <a:r>
-              <a:rPr lang="en-US" sz="2800" b="1" dirty="0">
-                <a:solidFill>
-                  <a:schemeClr val="accent1">
-                    <a:lumMod val="75000"/>
-                  </a:schemeClr>
-                </a:solidFill>
-              </a:rPr>
-              <a:t>math </a:t>
-            </a:r>
-            <a:r>
-              <a:rPr lang="en-US" sz="2800" b="1" dirty="0" smtClean="0">
-                <a:solidFill>
-                  <a:schemeClr val="accent1">
-                    <a:lumMod val="75000"/>
-                  </a:schemeClr>
-                </a:solidFill>
-              </a:rPr>
-              <a:t>statement</a:t>
-            </a:r>
-            <a:r>
-              <a:rPr lang="bg-BG" sz="2800" b="1" dirty="0" smtClean="0">
-                <a:solidFill>
-                  <a:schemeClr val="accent1">
-                    <a:lumMod val="75000"/>
-                  </a:schemeClr>
-                </a:solidFill>
-              </a:rPr>
-              <a:t>-</a:t>
-            </a:r>
-            <a:r>
-              <a:rPr lang="en-US" sz="2800" b="1" dirty="0" smtClean="0">
-                <a:solidFill>
-                  <a:schemeClr val="accent1">
-                    <a:lumMod val="75000"/>
-                  </a:schemeClr>
-                </a:solidFill>
-              </a:rPr>
-              <a:t>“From </a:t>
-            </a:r>
-            <a:r>
-              <a:rPr lang="en-US" sz="2800" b="1" dirty="0">
-                <a:solidFill>
-                  <a:schemeClr val="accent1">
-                    <a:lumMod val="75000"/>
-                  </a:schemeClr>
-                </a:solidFill>
-              </a:rPr>
-              <a:t>a mathematical standpoint, the result follows directly from established principles and does not require additional assumptions.”</a:t>
-            </a:r>
-          </a:p>
-          <a:p>
-            <a:pPr marL="342900" indent="-342900">
-              <a:buFont typeface="Arial" panose="020B0604020202020204" pitchFamily="34" charset="0"/>
-              <a:buChar char="•"/>
-            </a:pPr>
-            <a:r>
-              <a:rPr lang="en-US" sz="2800" b="1" dirty="0" smtClean="0">
-                <a:solidFill>
-                  <a:schemeClr val="accent1">
-                    <a:lumMod val="75000"/>
-                  </a:schemeClr>
-                </a:solidFill>
-              </a:rPr>
-              <a:t>Explaining </a:t>
-            </a:r>
-            <a:r>
-              <a:rPr lang="en-US" sz="2800" b="1" dirty="0">
-                <a:solidFill>
-                  <a:schemeClr val="accent1">
-                    <a:lumMod val="75000"/>
-                  </a:schemeClr>
-                </a:solidFill>
-              </a:rPr>
-              <a:t>a </a:t>
-            </a:r>
-            <a:r>
-              <a:rPr lang="en-US" sz="2800" b="1" dirty="0" smtClean="0">
-                <a:solidFill>
-                  <a:schemeClr val="accent1">
-                    <a:lumMod val="75000"/>
-                  </a:schemeClr>
-                </a:solidFill>
-              </a:rPr>
-              <a:t>concept</a:t>
-            </a:r>
-            <a:r>
-              <a:rPr lang="bg-BG" sz="2800" b="1" dirty="0">
-                <a:solidFill>
-                  <a:schemeClr val="accent1">
-                    <a:lumMod val="75000"/>
-                  </a:schemeClr>
-                </a:solidFill>
-              </a:rPr>
-              <a:t>-</a:t>
-            </a:r>
-            <a:r>
-              <a:rPr lang="en-US" sz="2800" b="1" dirty="0" smtClean="0">
-                <a:solidFill>
-                  <a:schemeClr val="accent1">
-                    <a:lumMod val="75000"/>
-                  </a:schemeClr>
-                </a:solidFill>
-              </a:rPr>
-              <a:t>“This </a:t>
-            </a:r>
-            <a:r>
-              <a:rPr lang="en-US" sz="2800" b="1" dirty="0">
-                <a:solidFill>
-                  <a:schemeClr val="accent1">
-                    <a:lumMod val="75000"/>
-                  </a:schemeClr>
-                </a:solidFill>
-              </a:rPr>
-              <a:t>relationship can be formalized by expressing the system as a function, where the output varies predictably with respect to the input.”</a:t>
-            </a:r>
-          </a:p>
-          <a:p>
-            <a:pPr marL="342900" indent="-342900">
-              <a:buFont typeface="Arial" panose="020B0604020202020204" pitchFamily="34" charset="0"/>
-              <a:buChar char="•"/>
-            </a:pPr>
-            <a:r>
-              <a:rPr lang="en-US" sz="2800" b="1" dirty="0" smtClean="0">
-                <a:solidFill>
-                  <a:schemeClr val="accent1">
-                    <a:lumMod val="75000"/>
-                  </a:schemeClr>
-                </a:solidFill>
-              </a:rPr>
-              <a:t>Analytical tone</a:t>
-            </a:r>
-            <a:r>
-              <a:rPr lang="bg-BG" sz="2800" b="1" dirty="0" smtClean="0">
-                <a:solidFill>
-                  <a:schemeClr val="accent1">
-                    <a:lumMod val="75000"/>
-                  </a:schemeClr>
-                </a:solidFill>
-              </a:rPr>
-              <a:t>-</a:t>
-            </a:r>
-            <a:r>
-              <a:rPr lang="en-US" sz="2800" b="1" dirty="0" smtClean="0">
-                <a:solidFill>
-                  <a:schemeClr val="accent1">
-                    <a:lumMod val="75000"/>
-                  </a:schemeClr>
-                </a:solidFill>
-              </a:rPr>
-              <a:t>“Our </a:t>
-            </a:r>
-            <a:r>
-              <a:rPr lang="en-US" sz="2800" b="1" dirty="0">
-                <a:solidFill>
-                  <a:schemeClr val="accent1">
-                    <a:lumMod val="75000"/>
-                  </a:schemeClr>
-                </a:solidFill>
-              </a:rPr>
-              <a:t>evaluation shows that the solution converges under standard conditions, indicating stability within the defined parameters.”</a:t>
-            </a:r>
-          </a:p>
-          <a:p>
-            <a:pPr marL="342900" indent="-342900">
-              <a:buFont typeface="Arial" panose="020B0604020202020204" pitchFamily="34" charset="0"/>
-              <a:buChar char="•"/>
-            </a:pPr>
-            <a:r>
-              <a:rPr lang="en-US" sz="2800" b="1" dirty="0" smtClean="0">
-                <a:solidFill>
-                  <a:schemeClr val="accent1">
-                    <a:lumMod val="75000"/>
-                  </a:schemeClr>
-                </a:solidFill>
-              </a:rPr>
-              <a:t>Addressing correctness</a:t>
-            </a:r>
-            <a:r>
-              <a:rPr lang="bg-BG" sz="2800" b="1" dirty="0">
-                <a:solidFill>
-                  <a:schemeClr val="accent1">
-                    <a:lumMod val="75000"/>
-                  </a:schemeClr>
-                </a:solidFill>
-              </a:rPr>
-              <a:t>-</a:t>
-            </a:r>
-            <a:r>
-              <a:rPr lang="en-US" sz="2800" b="1" dirty="0" smtClean="0">
-                <a:solidFill>
-                  <a:schemeClr val="accent1">
-                    <a:lumMod val="75000"/>
-                  </a:schemeClr>
-                </a:solidFill>
-              </a:rPr>
-              <a:t>“The </a:t>
-            </a:r>
-            <a:r>
-              <a:rPr lang="en-US" sz="2800" b="1" dirty="0">
-                <a:solidFill>
-                  <a:schemeClr val="accent1">
-                    <a:lumMod val="75000"/>
-                  </a:schemeClr>
-                </a:solidFill>
-              </a:rPr>
-              <a:t>result is consistent with the underlying theorem and can be verified through substitution or direct computation</a:t>
-            </a:r>
-            <a:r>
-              <a:rPr lang="en-US" sz="2800" b="1" dirty="0" smtClean="0">
-                <a:solidFill>
-                  <a:schemeClr val="accent1">
-                    <a:lumMod val="75000"/>
-                  </a:schemeClr>
-                </a:solidFill>
-              </a:rPr>
-              <a:t>.”</a:t>
-            </a:r>
-            <a:endParaRPr lang="bg-BG" sz="2800" b="1" dirty="0" smtClean="0">
-              <a:solidFill>
-                <a:schemeClr val="accent1">
-                  <a:lumMod val="75000"/>
-                </a:schemeClr>
-              </a:solidFill>
-            </a:endParaRPr>
-          </a:p>
-          <a:p>
-            <a:pPr marL="342900" indent="-342900">
-              <a:buFont typeface="Arial" panose="020B0604020202020204" pitchFamily="34" charset="0"/>
-              <a:buChar char="•"/>
-            </a:pPr>
-            <a:r>
-              <a:rPr lang="en-US" sz="2800" b="1" dirty="0" smtClean="0">
-                <a:solidFill>
-                  <a:schemeClr val="accent1">
-                    <a:lumMod val="75000"/>
-                  </a:schemeClr>
-                </a:solidFill>
-              </a:rPr>
-              <a:t>Problem-solving</a:t>
-            </a:r>
-            <a:r>
-              <a:rPr lang="bg-BG" sz="2800" b="1" dirty="0">
-                <a:solidFill>
-                  <a:schemeClr val="accent1">
-                    <a:lumMod val="75000"/>
-                  </a:schemeClr>
-                </a:solidFill>
-              </a:rPr>
-              <a:t>-</a:t>
-            </a:r>
-            <a:r>
-              <a:rPr lang="en-US" sz="2800" b="1" dirty="0" smtClean="0">
-                <a:solidFill>
-                  <a:schemeClr val="accent1">
-                    <a:lumMod val="75000"/>
-                  </a:schemeClr>
-                </a:solidFill>
-              </a:rPr>
-              <a:t>“By </a:t>
-            </a:r>
-            <a:r>
-              <a:rPr lang="en-US" sz="2800" b="1" dirty="0">
-                <a:solidFill>
-                  <a:schemeClr val="accent1">
-                    <a:lumMod val="75000"/>
-                  </a:schemeClr>
-                </a:solidFill>
-              </a:rPr>
-              <a:t>reducing the expression and isolating the variable, we obtain a form that is significantly easier to evaluate.”</a:t>
-            </a:r>
           </a:p>
         </p:txBody>
       </p:sp>
@@ -4028,13 +3799,6 @@
       </p:transition>
     </mc:Fallback>
   </mc:AlternateContent>
-  <p:timing>
-    <p:tnLst>
-      <p:par>
-        <p:cTn id="1" dur="indefinite" restart="never" nodeType="tmRoot"/>
-      </p:par>
-    </p:tnLst>
-  </p:timing>
 </p:sld>
 </file>
 
@@ -4051,7 +3815,13 @@
     </p:bg>
     <p:spTree>
       <p:nvGrpSpPr>
-        <p:cNvPr id="1" name=""/>
+        <p:cNvPr id="1" name="">
+          <a:extLst>
+            <a:ext uri="{FF2B5EF4-FFF2-40B4-BE49-F238E27FC236}">
+              <a16:creationId xmlns:a16="http://schemas.microsoft.com/office/drawing/2014/main" id="{028A556B-6024-9F43-0951-578155245C26}"/>
+            </a:ext>
+          </a:extLst>
+        </p:cNvPr>
         <p:cNvGrpSpPr/>
         <p:nvPr/>
       </p:nvGrpSpPr>
@@ -4065,7 +3835,13 @@
       </p:grpSpPr>
       <p:sp>
         <p:nvSpPr>
-          <p:cNvPr id="2" name="Freeform 2"/>
+          <p:cNvPr id="2" name="Freeform 2">
+            <a:extLst>
+              <a:ext uri="{FF2B5EF4-FFF2-40B4-BE49-F238E27FC236}">
+                <a16:creationId xmlns:a16="http://schemas.microsoft.com/office/drawing/2014/main" id="{80C926AA-8380-021C-703A-65E1A80C3B5E}"/>
+              </a:ext>
+            </a:extLst>
+          </p:cNvPr>
           <p:cNvSpPr/>
           <p:nvPr/>
         </p:nvSpPr>
@@ -4105,7 +3881,7 @@
             <a:blip r:embed="rId2">
               <a:extLst>
                 <a:ext uri="{96DAC541-7B7A-43D3-8B79-37D633B846F1}">
-                  <asvg:svgBlip xmlns:asvg="http://schemas.microsoft.com/office/drawing/2016/SVG/main" xmlns="" r:embed="rId3"/>
+                  <asvg:svgBlip xmlns:asvg="http://schemas.microsoft.com/office/drawing/2016/SVG/main" r:embed="rId3"/>
                 </a:ext>
               </a:extLst>
             </a:blip>
@@ -4124,7 +3900,13 @@
       </p:sp>
       <p:sp>
         <p:nvSpPr>
-          <p:cNvPr id="3" name="Freeform 3"/>
+          <p:cNvPr id="3" name="Freeform 3">
+            <a:extLst>
+              <a:ext uri="{FF2B5EF4-FFF2-40B4-BE49-F238E27FC236}">
+                <a16:creationId xmlns:a16="http://schemas.microsoft.com/office/drawing/2014/main" id="{7B5289A8-CFAC-93E1-41E4-E938741253A1}"/>
+              </a:ext>
+            </a:extLst>
+          </p:cNvPr>
           <p:cNvSpPr/>
           <p:nvPr/>
         </p:nvSpPr>
@@ -4164,7 +3946,7 @@
             <a:blip r:embed="rId4">
               <a:extLst>
                 <a:ext uri="{96DAC541-7B7A-43D3-8B79-37D633B846F1}">
-                  <asvg:svgBlip xmlns:asvg="http://schemas.microsoft.com/office/drawing/2016/SVG/main" xmlns="" r:embed="rId5"/>
+                  <asvg:svgBlip xmlns:asvg="http://schemas.microsoft.com/office/drawing/2016/SVG/main" r:embed="rId5"/>
                 </a:ext>
               </a:extLst>
             </a:blip>
@@ -4183,21 +3965,27 @@
       </p:sp>
       <p:sp>
         <p:nvSpPr>
-          <p:cNvPr id="5" name="TextBox 5"/>
+          <p:cNvPr id="5" name="TextBox 5">
+            <a:extLst>
+              <a:ext uri="{FF2B5EF4-FFF2-40B4-BE49-F238E27FC236}">
+                <a16:creationId xmlns:a16="http://schemas.microsoft.com/office/drawing/2014/main" id="{95745D43-22D7-D8CE-0B59-09467208CA87}"/>
+              </a:ext>
+            </a:extLst>
+          </p:cNvPr>
           <p:cNvSpPr txBox="1"/>
           <p:nvPr/>
         </p:nvSpPr>
         <p:spPr>
           <a:xfrm>
-            <a:off x="7735220" y="5890641"/>
-            <a:ext cx="9902028" cy="1038746"/>
+            <a:off x="838200" y="5114476"/>
+            <a:ext cx="17068800" cy="1731243"/>
           </a:xfrm>
           <a:prstGeom prst="rect">
             <a:avLst/>
           </a:prstGeom>
         </p:spPr>
         <p:txBody>
-          <a:bodyPr lIns="0" tIns="0" rIns="0" bIns="0" rtlCol="0" anchor="t">
+          <a:bodyPr wrap="square" lIns="0" tIns="0" rIns="0" bIns="0" rtlCol="0" anchor="t">
             <a:spAutoFit/>
           </a:bodyPr>
           <a:lstStyle/>
@@ -4210,7 +3998,7 @@
               <a:buChar char="•"/>
             </a:pPr>
             <a:r>
-              <a:rPr lang="en-US" sz="2732" dirty="0" smtClean="0">
+              <a:rPr lang="en-US" sz="2732" dirty="0">
                 <a:solidFill>
                   <a:schemeClr val="accent1">
                     <a:lumMod val="75000"/>
@@ -4221,74 +4009,20 @@
                 <a:cs typeface="Cy Grotesk Wide"/>
                 <a:sym typeface="Cy Grotesk Wide"/>
               </a:rPr>
-              <a:t>Randomly chosen math </a:t>
-            </a:r>
-            <a:r>
-              <a:rPr lang="en-US" sz="2732" dirty="0" smtClean="0">
-                <a:solidFill>
-                  <a:schemeClr val="accent1">
-                    <a:lumMod val="75000"/>
-                  </a:schemeClr>
-                </a:solidFill>
-                <a:latin typeface="Cy Grotesk Wide"/>
-                <a:ea typeface="Cy Grotesk Wide"/>
-                <a:cs typeface="Cy Grotesk Wide"/>
-                <a:sym typeface="Cy Grotesk Wide"/>
-              </a:rPr>
-              <a:t>questions</a:t>
-            </a:r>
-          </a:p>
-          <a:p>
-            <a:pPr marL="589890" lvl="1" indent="-294945" algn="just">
-              <a:lnSpc>
-                <a:spcPts val="2732"/>
-              </a:lnSpc>
-              <a:buFont typeface="Arial"/>
-              <a:buChar char="•"/>
-            </a:pPr>
-            <a:r>
-              <a:rPr lang="en-US" sz="2732" dirty="0" smtClean="0">
-                <a:solidFill>
-                  <a:schemeClr val="accent1">
-                    <a:lumMod val="75000"/>
-                  </a:schemeClr>
-                </a:solidFill>
-                <a:latin typeface="Cy Grotesk Wide"/>
-                <a:ea typeface="Cy Grotesk Wide"/>
-                <a:cs typeface="Cy Grotesk Wide"/>
-                <a:sym typeface="Cy Grotesk Wide"/>
-              </a:rPr>
-              <a:t>Makes learning math easier</a:t>
-            </a:r>
-          </a:p>
-          <a:p>
-            <a:pPr marL="589890" lvl="1" indent="-294945" algn="just">
-              <a:lnSpc>
-                <a:spcPts val="2732"/>
-              </a:lnSpc>
-              <a:buFont typeface="Arial"/>
-              <a:buChar char="•"/>
-            </a:pPr>
-            <a:r>
-              <a:rPr lang="en-US" sz="2732" dirty="0" smtClean="0">
-                <a:solidFill>
-                  <a:schemeClr val="accent1">
-                    <a:lumMod val="75000"/>
-                  </a:schemeClr>
-                </a:solidFill>
-                <a:latin typeface="Cy Grotesk Wide"/>
-                <a:ea typeface="Cy Grotesk Wide"/>
-                <a:cs typeface="Cy Grotesk Wide"/>
-                <a:sym typeface="Cy Grotesk Wide"/>
-              </a:rPr>
-              <a:t>Compares your test scores against others</a:t>
-            </a:r>
-          </a:p>
-        </p:txBody>
-      </p:sp>
-      <p:sp>
-        <p:nvSpPr>
-          <p:cNvPr id="6" name="TextBox 6"/>
+              <a:t>The Goal of this project is to make math easier to understand. The app we have created has information that the users can use to learn the material they struggle with or simply practice. After that they can open one of our tests and practice the things they’ve learned from the info our team has provided. After completion the users can see their score and how far they have come. </a:t>
+            </a:r>
+          </a:p>
+        </p:txBody>
+      </p:sp>
+      <p:sp>
+        <p:nvSpPr>
+          <p:cNvPr id="6" name="TextBox 6">
+            <a:extLst>
+              <a:ext uri="{FF2B5EF4-FFF2-40B4-BE49-F238E27FC236}">
+                <a16:creationId xmlns:a16="http://schemas.microsoft.com/office/drawing/2014/main" id="{90980952-9FF1-A8E1-613F-8AD109D019C0}"/>
+              </a:ext>
+            </a:extLst>
+          </p:cNvPr>
           <p:cNvSpPr txBox="1"/>
           <p:nvPr/>
         </p:nvSpPr>
@@ -4313,7 +4047,7 @@
               </a:lnSpc>
             </a:pPr>
             <a:r>
-              <a:rPr lang="en-US" sz="6000" b="1" spc="714" dirty="0" smtClean="0">
+              <a:rPr lang="de-DE" sz="6000" b="1" spc="714" dirty="0" err="1">
                 <a:solidFill>
                   <a:srgbClr val="3C6CA8"/>
                 </a:solidFill>
@@ -4322,7 +4056,31 @@
                 <a:cs typeface="Lastica Bold"/>
                 <a:sym typeface="Lastica Bold"/>
               </a:rPr>
-              <a:t>Features</a:t>
+              <a:t>Our</a:t>
+            </a:r>
+            <a:r>
+              <a:rPr lang="de-DE" sz="6000" b="1" spc="714" dirty="0">
+                <a:solidFill>
+                  <a:srgbClr val="3C6CA8"/>
+                </a:solidFill>
+                <a:latin typeface="Lastica Bold"/>
+                <a:ea typeface="Lastica Bold"/>
+                <a:cs typeface="Lastica Bold"/>
+                <a:sym typeface="Lastica Bold"/>
+              </a:rPr>
+              <a:t> </a:t>
+            </a:r>
+            <a:r>
+              <a:rPr lang="de-DE" sz="6000" b="1" spc="714" dirty="0" err="1">
+                <a:solidFill>
+                  <a:srgbClr val="3C6CA8"/>
+                </a:solidFill>
+                <a:latin typeface="Lastica Bold"/>
+                <a:ea typeface="Lastica Bold"/>
+                <a:cs typeface="Lastica Bold"/>
+                <a:sym typeface="Lastica Bold"/>
+              </a:rPr>
+              <a:t>goals</a:t>
             </a:r>
             <a:endParaRPr lang="en-US" sz="6000" b="1" spc="714" dirty="0">
               <a:solidFill>
@@ -4338,7 +4096,13 @@
       </p:sp>
       <p:sp>
         <p:nvSpPr>
-          <p:cNvPr id="7" name="AutoShape 2" descr="Александра Якимчук"/>
+          <p:cNvPr id="7" name="AutoShape 2" descr="Александра Якимчук">
+            <a:extLst>
+              <a:ext uri="{FF2B5EF4-FFF2-40B4-BE49-F238E27FC236}">
+                <a16:creationId xmlns:a16="http://schemas.microsoft.com/office/drawing/2014/main" id="{912F1B5D-5F83-4F68-9843-26C01A1A4B45}"/>
+              </a:ext>
+            </a:extLst>
+          </p:cNvPr>
           <p:cNvSpPr>
             <a:spLocks noChangeAspect="1" noChangeArrowheads="1"/>
           </p:cNvSpPr>
@@ -4376,29 +4140,27 @@
         </p:txBody>
       </p:sp>
     </p:spTree>
+    <p:extLst>
+      <p:ext uri="{BB962C8B-B14F-4D97-AF65-F5344CB8AC3E}">
+        <p14:creationId xmlns:p14="http://schemas.microsoft.com/office/powerpoint/2010/main" val="1813935978"/>
+      </p:ext>
+    </p:extLst>
   </p:cSld>
   <p:clrMapOvr>
     <a:masterClrMapping/>
   </p:clrMapOvr>
-  <mc:AlternateContent xmlns:mc="http://schemas.openxmlformats.org/markup-compatibility/2006" xmlns:p159="http://schemas.microsoft.com/office/powerpoint/2015/09/main">
-    <mc:Choice Requires="p159">
+  <mc:AlternateContent xmlns:mc="http://schemas.openxmlformats.org/markup-compatibility/2006">
+    <mc:Choice xmlns:p159="http://schemas.microsoft.com/office/powerpoint/2015/09/main" Requires="p159">
       <p:transition xmlns:p14="http://schemas.microsoft.com/office/powerpoint/2010/main" spd="slow" p14:dur="2000">
         <p159:morph option="byWord"/>
       </p:transition>
     </mc:Choice>
-    <mc:Fallback xmlns="">
+    <mc:Fallback>
       <p:transition spd="slow">
         <p:fade/>
       </p:transition>
     </mc:Fallback>
   </mc:AlternateContent>
-  <p:timing>
-    <p:tnLst>
-      <p:par>
-        <p:cTn id="1" dur="indefinite" restart="never" nodeType="tmRoot"/>
-      </p:par>
-    </p:tnLst>
-  </p:timing>
 </p:sld>
 </file>
 
@@ -4463,29 +4225,8 @@
                 <a:cs typeface="Lastica Bold"/>
                 <a:sym typeface="Lastica Bold"/>
               </a:rPr>
-              <a:t>Our </a:t>
-            </a:r>
-            <a:r>
-              <a:rPr lang="en-US" sz="7720" b="1" spc="918" dirty="0" smtClean="0">
-                <a:solidFill>
-                  <a:srgbClr val="3C6CA8"/>
-                </a:solidFill>
-                <a:latin typeface="Lastica Bold"/>
-                <a:ea typeface="Lastica Bold"/>
-                <a:cs typeface="Lastica Bold"/>
-                <a:sym typeface="Lastica Bold"/>
-              </a:rPr>
-              <a:t>team</a:t>
-            </a:r>
-            <a:endParaRPr lang="en-US" sz="7720" b="1" spc="918" dirty="0">
-              <a:solidFill>
-                <a:srgbClr val="3C6CA8"/>
-              </a:solidFill>
-              <a:latin typeface="Lastica Bold"/>
-              <a:ea typeface="Lastica Bold"/>
-              <a:cs typeface="Lastica Bold"/>
-              <a:sym typeface="Lastica Bold"/>
-            </a:endParaRPr>
+              <a:t>Our team</a:t>
+            </a:r>
           </a:p>
         </p:txBody>
       </p:sp>
@@ -4531,7 +4272,7 @@
             <a:blip r:embed="rId2">
               <a:extLst>
                 <a:ext uri="{96DAC541-7B7A-43D3-8B79-37D633B846F1}">
-                  <asvg:svgBlip xmlns:asvg="http://schemas.microsoft.com/office/drawing/2016/SVG/main" xmlns="" r:embed="rId3"/>
+                  <asvg:svgBlip xmlns:asvg="http://schemas.microsoft.com/office/drawing/2016/SVG/main" r:embed="rId3"/>
                 </a:ext>
               </a:extLst>
             </a:blip>
@@ -4590,7 +4331,7 @@
             <a:blip r:embed="rId4">
               <a:extLst>
                 <a:ext uri="{96DAC541-7B7A-43D3-8B79-37D633B846F1}">
-                  <asvg:svgBlip xmlns:asvg="http://schemas.microsoft.com/office/drawing/2016/SVG/main" xmlns="" r:embed="rId6"/>
+                  <asvg:svgBlip xmlns:asvg="http://schemas.microsoft.com/office/drawing/2016/SVG/main" r:embed="rId5"/>
                 </a:ext>
               </a:extLst>
             </a:blip>
@@ -4634,7 +4375,7 @@
               </a:lnSpc>
             </a:pPr>
             <a:r>
-              <a:rPr lang="en-US" sz="2599" b="1" dirty="0" smtClean="0">
+              <a:rPr lang="en-US" sz="2599" b="1" dirty="0">
                 <a:solidFill>
                   <a:srgbClr val="3C6CA8"/>
                 </a:solidFill>
@@ -4646,7 +4387,7 @@
               <a:t>Ivan Ivanov </a:t>
             </a:r>
             <a:r>
-              <a:rPr lang="en-US" sz="2599" b="1" dirty="0" err="1" smtClean="0">
+              <a:rPr lang="en-US" sz="2599" b="1" dirty="0" err="1">
                 <a:solidFill>
                   <a:srgbClr val="3C6CA8"/>
                 </a:solidFill>
@@ -4929,7 +4670,7 @@
               </a:lnSpc>
             </a:pPr>
             <a:r>
-              <a:rPr lang="en-US" sz="2023" dirty="0" smtClean="0">
+              <a:rPr lang="en-US" sz="2023" dirty="0">
                 <a:solidFill>
                   <a:srgbClr val="3C6CA8"/>
                 </a:solidFill>
@@ -4940,15 +4681,6 @@
               </a:rPr>
               <a:t>Designer</a:t>
             </a:r>
-            <a:endParaRPr lang="en-US" sz="2023" dirty="0">
-              <a:solidFill>
-                <a:srgbClr val="3C6CA8"/>
-              </a:solidFill>
-              <a:latin typeface="Cy Grotesk Wide"/>
-              <a:ea typeface="Cy Grotesk Wide"/>
-              <a:cs typeface="Cy Grotesk Wide"/>
-              <a:sym typeface="Cy Grotesk Wide"/>
-            </a:endParaRPr>
           </a:p>
         </p:txBody>
       </p:sp>
@@ -5044,18 +4776,6 @@
               </a:lnSpc>
             </a:pPr>
             <a:r>
-              <a:rPr lang="en-US" sz="2023" dirty="0" smtClean="0">
-                <a:solidFill>
-                  <a:srgbClr val="3C6CA8"/>
-                </a:solidFill>
-                <a:latin typeface="Cy Grotesk Wide"/>
-                <a:ea typeface="Cy Grotesk Wide"/>
-                <a:cs typeface="Cy Grotesk Wide"/>
-                <a:sym typeface="Cy Grotesk Wide"/>
-              </a:rPr>
-              <a:t>BACK-END </a:t>
-            </a:r>
-            <a:r>
               <a:rPr lang="en-US" sz="2023" dirty="0">
                 <a:solidFill>
                   <a:srgbClr val="3C6CA8"/>
@@ -5065,7 +4785,7 @@
                 <a:cs typeface="Cy Grotesk Wide"/>
                 <a:sym typeface="Cy Grotesk Wide"/>
               </a:rPr>
-              <a:t>DEVELOPER</a:t>
+              <a:t>BACK-END DEVELOPER</a:t>
             </a:r>
           </a:p>
         </p:txBody>
@@ -5079,7 +4799,7 @@
           <p:nvPr/>
         </p:nvPicPr>
         <p:blipFill>
-          <a:blip r:embed="rId7">
+          <a:blip r:embed="rId6">
             <a:extLst>
               <a:ext uri="{28A0092B-C50C-407E-A947-70E740481C1C}">
                 <a14:useLocalDpi xmlns:a14="http://schemas.microsoft.com/office/drawing/2010/main" val="0"/>
@@ -5148,7 +4868,7 @@
           <p:nvPr/>
         </p:nvPicPr>
         <p:blipFill>
-          <a:blip r:embed="rId8">
+          <a:blip r:embed="rId7">
             <a:extLst>
               <a:ext uri="{28A0092B-C50C-407E-A947-70E740481C1C}">
                 <a14:useLocalDpi xmlns:a14="http://schemas.microsoft.com/office/drawing/2010/main" val="0"/>
@@ -5212,7 +4932,7 @@
           <p:nvPr/>
         </p:nvPicPr>
         <p:blipFill>
-          <a:blip r:embed="rId9">
+          <a:blip r:embed="rId8">
             <a:extLst>
               <a:ext uri="{28A0092B-C50C-407E-A947-70E740481C1C}">
                 <a14:useLocalDpi xmlns:a14="http://schemas.microsoft.com/office/drawing/2010/main" val="0"/>
@@ -5393,7 +5113,7 @@
           <p:nvPr/>
         </p:nvPicPr>
         <p:blipFill>
-          <a:blip r:embed="rId10" cstate="print">
+          <a:blip r:embed="rId9" cstate="print">
             <a:extLst>
               <a:ext uri="{28A0092B-C50C-407E-A947-70E740481C1C}">
                 <a14:useLocalDpi xmlns:a14="http://schemas.microsoft.com/office/drawing/2010/main" val="0"/>
@@ -5447,7 +5167,7 @@
           <p:nvPr/>
         </p:nvPicPr>
         <p:blipFill>
-          <a:blip r:embed="rId11"/>
+          <a:blip r:embed="rId10"/>
           <a:stretch>
             <a:fillRect/>
           </a:stretch>
@@ -5479,13 +5199,6 @@
       </p:transition>
     </mc:Fallback>
   </mc:AlternateContent>
-  <p:timing>
-    <p:tnLst>
-      <p:par>
-        <p:cTn id="1" dur="indefinite" restart="never" nodeType="tmRoot"/>
-      </p:par>
-    </p:tnLst>
-  </p:timing>
 </p:sld>
 </file>
 
@@ -5556,7 +5269,7 @@
             <a:blip r:embed="rId2">
               <a:extLst>
                 <a:ext uri="{96DAC541-7B7A-43D3-8B79-37D633B846F1}">
-                  <asvg:svgBlip xmlns:asvg="http://schemas.microsoft.com/office/drawing/2016/SVG/main" xmlns="" r:embed="rId3"/>
+                  <asvg:svgBlip xmlns:asvg="http://schemas.microsoft.com/office/drawing/2016/SVG/main" r:embed="rId3"/>
                 </a:ext>
               </a:extLst>
             </a:blip>
@@ -5615,7 +5328,7 @@
             <a:blip r:embed="rId4">
               <a:extLst>
                 <a:ext uri="{96DAC541-7B7A-43D3-8B79-37D633B846F1}">
-                  <asvg:svgBlip xmlns:asvg="http://schemas.microsoft.com/office/drawing/2016/SVG/main" xmlns="" r:embed="rId5"/>
+                  <asvg:svgBlip xmlns:asvg="http://schemas.microsoft.com/office/drawing/2016/SVG/main" r:embed="rId5"/>
                 </a:ext>
               </a:extLst>
             </a:blip>
@@ -6077,13 +5790,6 @@
       </p:transition>
     </mc:Fallback>
   </mc:AlternateContent>
-  <p:timing>
-    <p:tnLst>
-      <p:par>
-        <p:cTn id="1" dur="indefinite" restart="never" nodeType="tmRoot"/>
-      </p:par>
-    </p:tnLst>
-  </p:timing>
 </p:sld>
 </file>
 
@@ -6154,7 +5860,7 @@
             <a:blip r:embed="rId2">
               <a:extLst>
                 <a:ext uri="{96DAC541-7B7A-43D3-8B79-37D633B846F1}">
-                  <asvg:svgBlip xmlns:asvg="http://schemas.microsoft.com/office/drawing/2016/SVG/main" xmlns="" r:embed="rId3"/>
+                  <asvg:svgBlip xmlns:asvg="http://schemas.microsoft.com/office/drawing/2016/SVG/main" r:embed="rId3"/>
                 </a:ext>
               </a:extLst>
             </a:blip>
@@ -6213,7 +5919,7 @@
             <a:blip r:embed="rId4">
               <a:extLst>
                 <a:ext uri="{96DAC541-7B7A-43D3-8B79-37D633B846F1}">
-                  <asvg:svgBlip xmlns:asvg="http://schemas.microsoft.com/office/drawing/2016/SVG/main" xmlns="" r:embed="rId5"/>
+                  <asvg:svgBlip xmlns:asvg="http://schemas.microsoft.com/office/drawing/2016/SVG/main" r:embed="rId5"/>
                 </a:ext>
               </a:extLst>
             </a:blip>
@@ -6265,18 +5971,7 @@
                 </a:solidFill>
                 <a:latin typeface="Arial Black" panose="020B0A04020102020204" pitchFamily="34" charset="0"/>
               </a:rPr>
-              <a:t>LET’S CONTINUE WITH THE GAME</a:t>
-            </a:r>
-            <a:r>
-              <a:rPr lang="en-AU" sz="9600" dirty="0" smtClean="0">
-                <a:solidFill>
-                  <a:schemeClr val="accent1">
-                    <a:lumMod val="75000"/>
-                  </a:schemeClr>
-                </a:solidFill>
-                <a:latin typeface="Arial Black" panose="020B0A04020102020204" pitchFamily="34" charset="0"/>
-              </a:rPr>
-              <a:t>!</a:t>
+              <a:t>LET’S CONTINUE WITH THE APP!</a:t>
             </a:r>
             <a:endParaRPr lang="en-US" sz="9440" b="1" spc="1123" dirty="0">
               <a:solidFill>
@@ -6307,13 +6002,6 @@
       </p:transition>
     </mc:Fallback>
   </mc:AlternateContent>
-  <p:timing>
-    <p:tnLst>
-      <p:par>
-        <p:cTn id="1" dur="indefinite" restart="never" nodeType="tmRoot"/>
-      </p:par>
-    </p:tnLst>
-  </p:timing>
 </p:sld>
 </file>
 
